--- a/templates/uno.pptx
+++ b/templates/uno.pptx
@@ -341,7 +341,7 @@
             <a:fld id="{1D8BD707-D9CF-40AE-B4C6-C98DA3205C09}" type="datetimeFigureOut">
               <a:rPr lang="en-US" smtClean="0"/>
               <a:pPr/>
-              <a:t>6/23/2026</a:t>
+              <a:t>6/26/2026</a:t>
             </a:fld>
             <a:endParaRPr lang="en-US"/>
           </a:p>
@@ -506,7 +506,7 @@
             <a:fld id="{1D8BD707-D9CF-40AE-B4C6-C98DA3205C09}" type="datetimeFigureOut">
               <a:rPr lang="en-US" smtClean="0"/>
               <a:pPr/>
-              <a:t>6/23/2026</a:t>
+              <a:t>6/26/2026</a:t>
             </a:fld>
             <a:endParaRPr lang="en-US"/>
           </a:p>
@@ -681,7 +681,7 @@
             <a:fld id="{1D8BD707-D9CF-40AE-B4C6-C98DA3205C09}" type="datetimeFigureOut">
               <a:rPr lang="en-US" smtClean="0"/>
               <a:pPr/>
-              <a:t>6/23/2026</a:t>
+              <a:t>6/26/2026</a:t>
             </a:fld>
             <a:endParaRPr lang="en-US"/>
           </a:p>
@@ -846,7 +846,7 @@
             <a:fld id="{1D8BD707-D9CF-40AE-B4C6-C98DA3205C09}" type="datetimeFigureOut">
               <a:rPr lang="en-US" smtClean="0"/>
               <a:pPr/>
-              <a:t>6/23/2026</a:t>
+              <a:t>6/26/2026</a:t>
             </a:fld>
             <a:endParaRPr lang="en-US"/>
           </a:p>
@@ -1088,7 +1088,7 @@
             <a:fld id="{1D8BD707-D9CF-40AE-B4C6-C98DA3205C09}" type="datetimeFigureOut">
               <a:rPr lang="en-US" smtClean="0"/>
               <a:pPr/>
-              <a:t>6/23/2026</a:t>
+              <a:t>6/26/2026</a:t>
             </a:fld>
             <a:endParaRPr lang="en-US"/>
           </a:p>
@@ -1370,7 +1370,7 @@
             <a:fld id="{1D8BD707-D9CF-40AE-B4C6-C98DA3205C09}" type="datetimeFigureOut">
               <a:rPr lang="en-US" smtClean="0"/>
               <a:pPr/>
-              <a:t>6/23/2026</a:t>
+              <a:t>6/26/2026</a:t>
             </a:fld>
             <a:endParaRPr lang="en-US"/>
           </a:p>
@@ -1786,7 +1786,7 @@
             <a:fld id="{1D8BD707-D9CF-40AE-B4C6-C98DA3205C09}" type="datetimeFigureOut">
               <a:rPr lang="en-US" smtClean="0"/>
               <a:pPr/>
-              <a:t>6/23/2026</a:t>
+              <a:t>6/26/2026</a:t>
             </a:fld>
             <a:endParaRPr lang="en-US"/>
           </a:p>
@@ -1900,7 +1900,7 @@
             <a:fld id="{1D8BD707-D9CF-40AE-B4C6-C98DA3205C09}" type="datetimeFigureOut">
               <a:rPr lang="en-US" smtClean="0"/>
               <a:pPr/>
-              <a:t>6/23/2026</a:t>
+              <a:t>6/26/2026</a:t>
             </a:fld>
             <a:endParaRPr lang="en-US"/>
           </a:p>
@@ -1992,7 +1992,7 @@
             <a:fld id="{1D8BD707-D9CF-40AE-B4C6-C98DA3205C09}" type="datetimeFigureOut">
               <a:rPr lang="en-US" smtClean="0"/>
               <a:pPr/>
-              <a:t>6/23/2026</a:t>
+              <a:t>6/26/2026</a:t>
             </a:fld>
             <a:endParaRPr lang="en-US"/>
           </a:p>
@@ -2264,7 +2264,7 @@
             <a:fld id="{1D8BD707-D9CF-40AE-B4C6-C98DA3205C09}" type="datetimeFigureOut">
               <a:rPr lang="en-US" smtClean="0"/>
               <a:pPr/>
-              <a:t>6/23/2026</a:t>
+              <a:t>6/26/2026</a:t>
             </a:fld>
             <a:endParaRPr lang="en-US"/>
           </a:p>
@@ -2513,7 +2513,7 @@
             <a:fld id="{1D8BD707-D9CF-40AE-B4C6-C98DA3205C09}" type="datetimeFigureOut">
               <a:rPr lang="en-US" smtClean="0"/>
               <a:pPr/>
-              <a:t>6/23/2026</a:t>
+              <a:t>6/26/2026</a:t>
             </a:fld>
             <a:endParaRPr lang="en-US"/>
           </a:p>
@@ -2721,7 +2721,7 @@
             <a:fld id="{1D8BD707-D9CF-40AE-B4C6-C98DA3205C09}" type="datetimeFigureOut">
               <a:rPr lang="en-US" smtClean="0"/>
               <a:pPr/>
-              <a:t>6/23/2026</a:t>
+              <a:t>6/26/2026</a:t>
             </a:fld>
             <a:endParaRPr lang="en-US"/>
           </a:p>
@@ -3340,8 +3340,8 @@
         </p:nvSpPr>
         <p:spPr>
           <a:xfrm>
-            <a:off x="2897064" y="5525788"/>
-            <a:ext cx="4033669" cy="571182"/>
+            <a:off x="2897064" y="5523074"/>
+            <a:ext cx="4033669" cy="534826"/>
           </a:xfrm>
           <a:prstGeom prst="rect">
             <a:avLst/>
@@ -3359,7 +3359,7 @@
               </a:lnSpc>
             </a:pPr>
             <a:r>
-              <a:rPr lang="en-US" sz="3300" b="1" dirty="0">
+              <a:rPr lang="en-US" sz="2500" b="1" dirty="0">
                 <a:solidFill>
                   <a:srgbClr val="000000"/>
                 </a:solidFill>
@@ -8247,432 +8247,6 @@
           </a:p>
         </p:txBody>
       </p:sp>
-      <p:grpSp>
-        <p:nvGrpSpPr>
-          <p:cNvPr id="64" name="Group 63">
-            <a:extLst>
-              <a:ext uri="{FF2B5EF4-FFF2-40B4-BE49-F238E27FC236}">
-                <a16:creationId xmlns:a16="http://schemas.microsoft.com/office/drawing/2014/main" id="{6F7C81D1-4817-15B5-EDD0-80B1E1979CCF}"/>
-              </a:ext>
-            </a:extLst>
-          </p:cNvPr>
-          <p:cNvGrpSpPr/>
-          <p:nvPr/>
-        </p:nvGrpSpPr>
-        <p:grpSpPr>
-          <a:xfrm>
-            <a:off x="2599581" y="6430390"/>
-            <a:ext cx="326418" cy="350420"/>
-            <a:chOff x="0" y="-19050"/>
-            <a:chExt cx="62793" cy="92292"/>
-          </a:xfrm>
-        </p:grpSpPr>
-        <p:sp>
-          <p:nvSpPr>
-            <p:cNvPr id="65" name="Freeform 47">
-              <a:extLst>
-                <a:ext uri="{FF2B5EF4-FFF2-40B4-BE49-F238E27FC236}">
-                  <a16:creationId xmlns:a16="http://schemas.microsoft.com/office/drawing/2014/main" id="{F8CD94AB-6A97-310B-74A9-6B060C21F820}"/>
-                </a:ext>
-              </a:extLst>
-            </p:cNvPr>
-            <p:cNvSpPr/>
-            <p:nvPr/>
-          </p:nvSpPr>
-          <p:spPr>
-            <a:xfrm>
-              <a:off x="0" y="0"/>
-              <a:ext cx="62793" cy="73242"/>
-            </a:xfrm>
-            <a:custGeom>
-              <a:avLst/>
-              <a:gdLst/>
-              <a:ahLst/>
-              <a:cxnLst/>
-              <a:rect l="l" t="t" r="r" b="b"/>
-              <a:pathLst>
-                <a:path w="62793" h="73242">
-                  <a:moveTo>
-                    <a:pt x="0" y="0"/>
-                  </a:moveTo>
-                  <a:lnTo>
-                    <a:pt x="62793" y="0"/>
-                  </a:lnTo>
-                  <a:lnTo>
-                    <a:pt x="62793" y="73242"/>
-                  </a:lnTo>
-                  <a:lnTo>
-                    <a:pt x="0" y="73242"/>
-                  </a:lnTo>
-                  <a:close/>
-                </a:path>
-              </a:pathLst>
-            </a:custGeom>
-            <a:solidFill>
-              <a:srgbClr val="FFD300"/>
-            </a:solidFill>
-          </p:spPr>
-          <p:txBody>
-            <a:bodyPr/>
-            <a:lstStyle/>
-            <a:p>
-              <a:endParaRPr lang="pt-BR"/>
-            </a:p>
-          </p:txBody>
-        </p:sp>
-        <p:sp>
-          <p:nvSpPr>
-            <p:cNvPr id="66" name="TextBox 48">
-              <a:extLst>
-                <a:ext uri="{FF2B5EF4-FFF2-40B4-BE49-F238E27FC236}">
-                  <a16:creationId xmlns:a16="http://schemas.microsoft.com/office/drawing/2014/main" id="{4937C0B1-9AF5-1FE3-2AE5-C646AEBCEA96}"/>
-                </a:ext>
-              </a:extLst>
-            </p:cNvPr>
-            <p:cNvSpPr txBox="1"/>
-            <p:nvPr/>
-          </p:nvSpPr>
-          <p:spPr>
-            <a:xfrm>
-              <a:off x="0" y="-19050"/>
-              <a:ext cx="62793" cy="92292"/>
-            </a:xfrm>
-            <a:prstGeom prst="rect">
-              <a:avLst/>
-            </a:prstGeom>
-          </p:spPr>
-          <p:txBody>
-            <a:bodyPr lIns="50800" tIns="50800" rIns="50800" bIns="50800" rtlCol="0" anchor="ctr"/>
-            <a:lstStyle>
-              <a:defPPr>
-                <a:defRPr lang="en-US"/>
-              </a:defPPr>
-              <a:lvl1pPr marL="0" algn="l" defTabSz="914400" rtl="0" eaLnBrk="1" latinLnBrk="0" hangingPunct="1">
-                <a:defRPr sz="1800" kern="1200">
-                  <a:solidFill>
-                    <a:schemeClr val="tx1"/>
-                  </a:solidFill>
-                  <a:latin typeface="+mn-lt"/>
-                  <a:ea typeface="+mn-ea"/>
-                  <a:cs typeface="+mn-cs"/>
-                </a:defRPr>
-              </a:lvl1pPr>
-              <a:lvl2pPr marL="457200" algn="l" defTabSz="914400" rtl="0" eaLnBrk="1" latinLnBrk="0" hangingPunct="1">
-                <a:defRPr sz="1800" kern="1200">
-                  <a:solidFill>
-                    <a:schemeClr val="tx1"/>
-                  </a:solidFill>
-                  <a:latin typeface="+mn-lt"/>
-                  <a:ea typeface="+mn-ea"/>
-                  <a:cs typeface="+mn-cs"/>
-                </a:defRPr>
-              </a:lvl2pPr>
-              <a:lvl3pPr marL="914400" algn="l" defTabSz="914400" rtl="0" eaLnBrk="1" latinLnBrk="0" hangingPunct="1">
-                <a:defRPr sz="1800" kern="1200">
-                  <a:solidFill>
-                    <a:schemeClr val="tx1"/>
-                  </a:solidFill>
-                  <a:latin typeface="+mn-lt"/>
-                  <a:ea typeface="+mn-ea"/>
-                  <a:cs typeface="+mn-cs"/>
-                </a:defRPr>
-              </a:lvl3pPr>
-              <a:lvl4pPr marL="1371600" algn="l" defTabSz="914400" rtl="0" eaLnBrk="1" latinLnBrk="0" hangingPunct="1">
-                <a:defRPr sz="1800" kern="1200">
-                  <a:solidFill>
-                    <a:schemeClr val="tx1"/>
-                  </a:solidFill>
-                  <a:latin typeface="+mn-lt"/>
-                  <a:ea typeface="+mn-ea"/>
-                  <a:cs typeface="+mn-cs"/>
-                </a:defRPr>
-              </a:lvl4pPr>
-              <a:lvl5pPr marL="1828800" algn="l" defTabSz="914400" rtl="0" eaLnBrk="1" latinLnBrk="0" hangingPunct="1">
-                <a:defRPr sz="1800" kern="1200">
-                  <a:solidFill>
-                    <a:schemeClr val="tx1"/>
-                  </a:solidFill>
-                  <a:latin typeface="+mn-lt"/>
-                  <a:ea typeface="+mn-ea"/>
-                  <a:cs typeface="+mn-cs"/>
-                </a:defRPr>
-              </a:lvl5pPr>
-              <a:lvl6pPr marL="2286000" algn="l" defTabSz="914400" rtl="0" eaLnBrk="1" latinLnBrk="0" hangingPunct="1">
-                <a:defRPr sz="1800" kern="1200">
-                  <a:solidFill>
-                    <a:schemeClr val="tx1"/>
-                  </a:solidFill>
-                  <a:latin typeface="+mn-lt"/>
-                  <a:ea typeface="+mn-ea"/>
-                  <a:cs typeface="+mn-cs"/>
-                </a:defRPr>
-              </a:lvl6pPr>
-              <a:lvl7pPr marL="2743200" algn="l" defTabSz="914400" rtl="0" eaLnBrk="1" latinLnBrk="0" hangingPunct="1">
-                <a:defRPr sz="1800" kern="1200">
-                  <a:solidFill>
-                    <a:schemeClr val="tx1"/>
-                  </a:solidFill>
-                  <a:latin typeface="+mn-lt"/>
-                  <a:ea typeface="+mn-ea"/>
-                  <a:cs typeface="+mn-cs"/>
-                </a:defRPr>
-              </a:lvl7pPr>
-              <a:lvl8pPr marL="3200400" algn="l" defTabSz="914400" rtl="0" eaLnBrk="1" latinLnBrk="0" hangingPunct="1">
-                <a:defRPr sz="1800" kern="1200">
-                  <a:solidFill>
-                    <a:schemeClr val="tx1"/>
-                  </a:solidFill>
-                  <a:latin typeface="+mn-lt"/>
-                  <a:ea typeface="+mn-ea"/>
-                  <a:cs typeface="+mn-cs"/>
-                </a:defRPr>
-              </a:lvl8pPr>
-              <a:lvl9pPr marL="3657600" algn="l" defTabSz="914400" rtl="0" eaLnBrk="1" latinLnBrk="0" hangingPunct="1">
-                <a:defRPr sz="1800" kern="1200">
-                  <a:solidFill>
-                    <a:schemeClr val="tx1"/>
-                  </a:solidFill>
-                  <a:latin typeface="+mn-lt"/>
-                  <a:ea typeface="+mn-ea"/>
-                  <a:cs typeface="+mn-cs"/>
-                </a:defRPr>
-              </a:lvl9pPr>
-            </a:lstStyle>
-            <a:p>
-              <a:pPr algn="ctr">
-                <a:lnSpc>
-                  <a:spcPts val="1387"/>
-                </a:lnSpc>
-              </a:pPr>
-              <a:r>
-                <a:rPr lang="en-US" sz="990" b="1" i="1">
-                  <a:solidFill>
-                    <a:srgbClr val="000000"/>
-                  </a:solidFill>
-                  <a:latin typeface="Open Sans Bold Italics"/>
-                  <a:ea typeface="Open Sans Bold Italics"/>
-                  <a:cs typeface="Open Sans Bold Italics"/>
-                  <a:sym typeface="Open Sans Bold Italics"/>
-                </a:rPr>
-                <a:t>01</a:t>
-              </a:r>
-            </a:p>
-          </p:txBody>
-        </p:sp>
-      </p:grpSp>
-      <p:grpSp>
-        <p:nvGrpSpPr>
-          <p:cNvPr id="67" name="Group 66">
-            <a:extLst>
-              <a:ext uri="{FF2B5EF4-FFF2-40B4-BE49-F238E27FC236}">
-                <a16:creationId xmlns:a16="http://schemas.microsoft.com/office/drawing/2014/main" id="{BAB8E13A-F666-1769-ACCC-FBD170322087}"/>
-              </a:ext>
-            </a:extLst>
-          </p:cNvPr>
-          <p:cNvGrpSpPr/>
-          <p:nvPr/>
-        </p:nvGrpSpPr>
-        <p:grpSpPr>
-          <a:xfrm>
-            <a:off x="7624762" y="6843576"/>
-            <a:ext cx="326418" cy="350420"/>
-            <a:chOff x="0" y="-19050"/>
-            <a:chExt cx="62793" cy="92292"/>
-          </a:xfrm>
-        </p:grpSpPr>
-        <p:sp>
-          <p:nvSpPr>
-            <p:cNvPr id="68" name="Freeform 47">
-              <a:extLst>
-                <a:ext uri="{FF2B5EF4-FFF2-40B4-BE49-F238E27FC236}">
-                  <a16:creationId xmlns:a16="http://schemas.microsoft.com/office/drawing/2014/main" id="{B4E3FF10-473D-9ECE-9A6E-D6D613FB2F42}"/>
-                </a:ext>
-              </a:extLst>
-            </p:cNvPr>
-            <p:cNvSpPr/>
-            <p:nvPr/>
-          </p:nvSpPr>
-          <p:spPr>
-            <a:xfrm>
-              <a:off x="0" y="0"/>
-              <a:ext cx="62793" cy="73242"/>
-            </a:xfrm>
-            <a:custGeom>
-              <a:avLst/>
-              <a:gdLst/>
-              <a:ahLst/>
-              <a:cxnLst/>
-              <a:rect l="l" t="t" r="r" b="b"/>
-              <a:pathLst>
-                <a:path w="62793" h="73242">
-                  <a:moveTo>
-                    <a:pt x="0" y="0"/>
-                  </a:moveTo>
-                  <a:lnTo>
-                    <a:pt x="62793" y="0"/>
-                  </a:lnTo>
-                  <a:lnTo>
-                    <a:pt x="62793" y="73242"/>
-                  </a:lnTo>
-                  <a:lnTo>
-                    <a:pt x="0" y="73242"/>
-                  </a:lnTo>
-                  <a:close/>
-                </a:path>
-              </a:pathLst>
-            </a:custGeom>
-            <a:solidFill>
-              <a:srgbClr val="FFD300"/>
-            </a:solidFill>
-          </p:spPr>
-          <p:txBody>
-            <a:bodyPr/>
-            <a:lstStyle/>
-            <a:p>
-              <a:endParaRPr lang="pt-BR"/>
-            </a:p>
-          </p:txBody>
-        </p:sp>
-        <p:sp>
-          <p:nvSpPr>
-            <p:cNvPr id="69" name="TextBox 48">
-              <a:extLst>
-                <a:ext uri="{FF2B5EF4-FFF2-40B4-BE49-F238E27FC236}">
-                  <a16:creationId xmlns:a16="http://schemas.microsoft.com/office/drawing/2014/main" id="{ACE2ABB6-BDEA-55EE-6B02-2905A0F007CA}"/>
-                </a:ext>
-              </a:extLst>
-            </p:cNvPr>
-            <p:cNvSpPr txBox="1"/>
-            <p:nvPr/>
-          </p:nvSpPr>
-          <p:spPr>
-            <a:xfrm>
-              <a:off x="0" y="-19050"/>
-              <a:ext cx="62793" cy="92292"/>
-            </a:xfrm>
-            <a:prstGeom prst="rect">
-              <a:avLst/>
-            </a:prstGeom>
-          </p:spPr>
-          <p:txBody>
-            <a:bodyPr lIns="50800" tIns="50800" rIns="50800" bIns="50800" rtlCol="0" anchor="ctr"/>
-            <a:lstStyle>
-              <a:defPPr>
-                <a:defRPr lang="en-US"/>
-              </a:defPPr>
-              <a:lvl1pPr marL="0" algn="l" defTabSz="914400" rtl="0" eaLnBrk="1" latinLnBrk="0" hangingPunct="1">
-                <a:defRPr sz="1800" kern="1200">
-                  <a:solidFill>
-                    <a:schemeClr val="tx1"/>
-                  </a:solidFill>
-                  <a:latin typeface="+mn-lt"/>
-                  <a:ea typeface="+mn-ea"/>
-                  <a:cs typeface="+mn-cs"/>
-                </a:defRPr>
-              </a:lvl1pPr>
-              <a:lvl2pPr marL="457200" algn="l" defTabSz="914400" rtl="0" eaLnBrk="1" latinLnBrk="0" hangingPunct="1">
-                <a:defRPr sz="1800" kern="1200">
-                  <a:solidFill>
-                    <a:schemeClr val="tx1"/>
-                  </a:solidFill>
-                  <a:latin typeface="+mn-lt"/>
-                  <a:ea typeface="+mn-ea"/>
-                  <a:cs typeface="+mn-cs"/>
-                </a:defRPr>
-              </a:lvl2pPr>
-              <a:lvl3pPr marL="914400" algn="l" defTabSz="914400" rtl="0" eaLnBrk="1" latinLnBrk="0" hangingPunct="1">
-                <a:defRPr sz="1800" kern="1200">
-                  <a:solidFill>
-                    <a:schemeClr val="tx1"/>
-                  </a:solidFill>
-                  <a:latin typeface="+mn-lt"/>
-                  <a:ea typeface="+mn-ea"/>
-                  <a:cs typeface="+mn-cs"/>
-                </a:defRPr>
-              </a:lvl3pPr>
-              <a:lvl4pPr marL="1371600" algn="l" defTabSz="914400" rtl="0" eaLnBrk="1" latinLnBrk="0" hangingPunct="1">
-                <a:defRPr sz="1800" kern="1200">
-                  <a:solidFill>
-                    <a:schemeClr val="tx1"/>
-                  </a:solidFill>
-                  <a:latin typeface="+mn-lt"/>
-                  <a:ea typeface="+mn-ea"/>
-                  <a:cs typeface="+mn-cs"/>
-                </a:defRPr>
-              </a:lvl4pPr>
-              <a:lvl5pPr marL="1828800" algn="l" defTabSz="914400" rtl="0" eaLnBrk="1" latinLnBrk="0" hangingPunct="1">
-                <a:defRPr sz="1800" kern="1200">
-                  <a:solidFill>
-                    <a:schemeClr val="tx1"/>
-                  </a:solidFill>
-                  <a:latin typeface="+mn-lt"/>
-                  <a:ea typeface="+mn-ea"/>
-                  <a:cs typeface="+mn-cs"/>
-                </a:defRPr>
-              </a:lvl5pPr>
-              <a:lvl6pPr marL="2286000" algn="l" defTabSz="914400" rtl="0" eaLnBrk="1" latinLnBrk="0" hangingPunct="1">
-                <a:defRPr sz="1800" kern="1200">
-                  <a:solidFill>
-                    <a:schemeClr val="tx1"/>
-                  </a:solidFill>
-                  <a:latin typeface="+mn-lt"/>
-                  <a:ea typeface="+mn-ea"/>
-                  <a:cs typeface="+mn-cs"/>
-                </a:defRPr>
-              </a:lvl6pPr>
-              <a:lvl7pPr marL="2743200" algn="l" defTabSz="914400" rtl="0" eaLnBrk="1" latinLnBrk="0" hangingPunct="1">
-                <a:defRPr sz="1800" kern="1200">
-                  <a:solidFill>
-                    <a:schemeClr val="tx1"/>
-                  </a:solidFill>
-                  <a:latin typeface="+mn-lt"/>
-                  <a:ea typeface="+mn-ea"/>
-                  <a:cs typeface="+mn-cs"/>
-                </a:defRPr>
-              </a:lvl7pPr>
-              <a:lvl8pPr marL="3200400" algn="l" defTabSz="914400" rtl="0" eaLnBrk="1" latinLnBrk="0" hangingPunct="1">
-                <a:defRPr sz="1800" kern="1200">
-                  <a:solidFill>
-                    <a:schemeClr val="tx1"/>
-                  </a:solidFill>
-                  <a:latin typeface="+mn-lt"/>
-                  <a:ea typeface="+mn-ea"/>
-                  <a:cs typeface="+mn-cs"/>
-                </a:defRPr>
-              </a:lvl8pPr>
-              <a:lvl9pPr marL="3657600" algn="l" defTabSz="914400" rtl="0" eaLnBrk="1" latinLnBrk="0" hangingPunct="1">
-                <a:defRPr sz="1800" kern="1200">
-                  <a:solidFill>
-                    <a:schemeClr val="tx1"/>
-                  </a:solidFill>
-                  <a:latin typeface="+mn-lt"/>
-                  <a:ea typeface="+mn-ea"/>
-                  <a:cs typeface="+mn-cs"/>
-                </a:defRPr>
-              </a:lvl9pPr>
-            </a:lstStyle>
-            <a:p>
-              <a:pPr algn="ctr">
-                <a:lnSpc>
-                  <a:spcPts val="1387"/>
-                </a:lnSpc>
-              </a:pPr>
-              <a:r>
-                <a:rPr lang="en-US" sz="990" b="1" i="1">
-                  <a:solidFill>
-                    <a:srgbClr val="000000"/>
-                  </a:solidFill>
-                  <a:latin typeface="Open Sans Bold Italics"/>
-                  <a:ea typeface="Open Sans Bold Italics"/>
-                  <a:cs typeface="Open Sans Bold Italics"/>
-                  <a:sym typeface="Open Sans Bold Italics"/>
-                </a:rPr>
-                <a:t>01</a:t>
-              </a:r>
-            </a:p>
-          </p:txBody>
-        </p:sp>
-      </p:grpSp>
     </p:spTree>
   </p:cSld>
   <p:clrMapOvr>
@@ -9061,8 +8635,8 @@
         </p:nvSpPr>
         <p:spPr>
           <a:xfrm>
-            <a:off x="5578684" y="2993443"/>
-            <a:ext cx="3946316" cy="548130"/>
+            <a:off x="5562600" y="3009900"/>
+            <a:ext cx="3946316" cy="505972"/>
           </a:xfrm>
           <a:prstGeom prst="rect">
             <a:avLst/>
@@ -9080,7 +8654,7 @@
               </a:lnSpc>
             </a:pPr>
             <a:r>
-              <a:rPr lang="en-US" sz="3170" b="1" dirty="0">
+              <a:rPr lang="en-US" sz="2500" b="1" dirty="0">
                 <a:solidFill>
                   <a:srgbClr val="FFFFFF"/>
                 </a:solidFill>
@@ -9373,7 +8947,7 @@
                 <a:cs typeface="Open Sans" panose="020B0606030504020204" pitchFamily="34" charset="0"/>
                 <a:sym typeface="Open Sans Bold Italics"/>
               </a:rPr>
-              <a:t>: 60 meses.</a:t>
+              <a:t>: [PRAZO]</a:t>
             </a:r>
           </a:p>
           <a:p>
